--- a/Major-Project-Phishing-Simulation/Major_Project_Presentation.pptx
+++ b/Major-Project-Phishing-Simulation/Major_Project_Presentation.pptx
@@ -4,6 +4,9 @@
   <p:sldMasterIdLst>
     <p:sldMasterId id="2147483648" r:id="rId1"/>
   </p:sldMasterIdLst>
+  <p:notesMasterIdLst>
+    <p:notesMasterId r:id="rId12"/>
+  </p:notesMasterIdLst>
   <p:sldIdLst>
     <p:sldId id="256" r:id="rId2"/>
     <p:sldId id="257" r:id="rId3"/>
@@ -16,9 +19,6 @@
     <p:sldId id="264" r:id="rId10"/>
     <p:sldId id="265" r:id="rId11"/>
   </p:sldIdLst>
-  <p:notesMasterIdLst>
-    <p:notesMasterId r:id="rId12"/>
-  </p:notesMasterIdLst>
   <p:sldSz cx="12192000" cy="6858000"/>
   <p:notesSz cx="6858000" cy="12192000"/>
   <p:defaultTextStyle>
@@ -113,6 +113,11 @@
       </a:defRPr>
     </a:lvl9pPr>
   </p:defaultTextStyle>
+  <p:extLst>
+    <p:ext uri="{EFAFB233-063F-42B5-8137-9DF3F51BA10A}">
+      <p15:sldGuideLst xmlns:p15="http://schemas.microsoft.com/office/powerpoint/2012/main"/>
+    </p:ext>
+  </p:extLst>
 </p:presentation>
 </file>
 
@@ -138,234 +143,10 @@
           <a:chExt cx="0" cy="0"/>
         </a:xfrm>
       </p:grpSpPr>
-      <p:sp>
-        <p:nvSpPr>
-          <p:cNvPr id="2" name="Header Placeholder 1"/>
-          <p:cNvSpPr>
-            <a:spLocks noGrp="1"/>
-          </p:cNvSpPr>
-          <p:nvPr>
-            <p:ph type="hdr" sz="quarter"/>
-          </p:nvPr>
-        </p:nvSpPr>
-        <p:spPr>
-          <a:xfrm>
-            <a:off x="0" y="0"/>
-            <a:ext cx="2971800" cy="458788"/>
-          </a:xfrm>
-          <a:prstGeom prst="rect">
-            <a:avLst/>
-          </a:prstGeom>
-        </p:spPr>
-        <p:txBody>
-          <a:bodyPr vert="horz" lIns="91440" tIns="45720" rIns="91440" bIns="45720" rtlCol="0"/>
-          <a:lstStyle>
-            <a:lvl1pPr algn="l">
-              <a:defRPr sz="1200"/>
-            </a:lvl1pPr>
-          </a:lstStyle>
-          <a:p>
-            <a:endParaRPr lang="en-US"/>
-          </a:p>
-        </p:txBody>
-      </p:sp>
-      <p:sp>
-        <p:nvSpPr>
-          <p:cNvPr id="3" name="Date Placeholder 2"/>
-          <p:cNvSpPr>
-            <a:spLocks noGrp="1"/>
-          </p:cNvSpPr>
-          <p:nvPr>
-            <p:ph type="dt" idx="1"/>
-          </p:nvPr>
-        </p:nvSpPr>
-        <p:spPr>
-          <a:xfrm>
-            <a:off x="3884613" y="0"/>
-            <a:ext cx="2971800" cy="458788"/>
-          </a:xfrm>
-          <a:prstGeom prst="rect">
-            <a:avLst/>
-          </a:prstGeom>
-        </p:spPr>
-        <p:txBody>
-          <a:bodyPr vert="horz" lIns="91440" tIns="45720" rIns="91440" bIns="45720" rtlCol="0"/>
-          <a:lstStyle>
-            <a:lvl1pPr algn="r">
-              <a:defRPr sz="1200"/>
-            </a:lvl1pPr>
-          </a:lstStyle>
-          <a:p>
-            <a:fld id="{5282F153-3F37-0F45-9E97-73ACFA13230C}" type="datetimeFigureOut">
-              <a:rPr lang="en-US"/>
-              <a:t>7/23/19</a:t>
-            </a:fld>
-            <a:endParaRPr lang="en-US"/>
-          </a:p>
-        </p:txBody>
-      </p:sp>
-      <p:sp>
-        <p:nvSpPr>
-          <p:cNvPr id="4" name="Slide Image Placeholder 3"/>
-          <p:cNvSpPr>
-            <a:spLocks noGrp="1" noRot="1" noChangeAspect="1"/>
-          </p:cNvSpPr>
-          <p:nvPr>
-            <p:ph type="sldImg" idx="2"/>
-          </p:nvPr>
-        </p:nvSpPr>
-        <p:spPr>
-          <a:xfrm>
-            <a:off x="685800" y="1143000"/>
-            <a:ext cx="5486400" cy="3086100"/>
-          </a:xfrm>
-          <a:prstGeom prst="rect">
-            <a:avLst/>
-          </a:prstGeom>
-          <a:noFill/>
-          <a:ln w="12700">
-            <a:solidFill>
-              <a:prstClr val="black"/>
-            </a:solidFill>
-          </a:ln>
-        </p:spPr>
-        <p:txBody>
-          <a:bodyPr vert="horz" lIns="91440" tIns="45720" rIns="91440" bIns="45720" rtlCol="0" anchor="ctr"/>
-          <a:lstStyle/>
-          <a:p>
-            <a:endParaRPr lang="en-US"/>
-          </a:p>
-        </p:txBody>
-      </p:sp>
-      <p:sp>
-        <p:nvSpPr>
-          <p:cNvPr id="5" name="Notes Placeholder 4"/>
-          <p:cNvSpPr>
-            <a:spLocks noGrp="1"/>
-          </p:cNvSpPr>
-          <p:nvPr>
-            <p:ph type="body" sz="quarter" idx="3"/>
-          </p:nvPr>
-        </p:nvSpPr>
-        <p:spPr>
-          <a:xfrm>
-            <a:off x="685800" y="4400550"/>
-            <a:ext cx="5486400" cy="3600450"/>
-          </a:xfrm>
-          <a:prstGeom prst="rect">
-            <a:avLst/>
-          </a:prstGeom>
-        </p:spPr>
-        <p:txBody>
-          <a:bodyPr vert="horz" lIns="91440" tIns="45720" rIns="91440" bIns="45720" rtlCol="0"/>
-          <a:lstStyle/>
-          <a:p>
-            <a:pPr lvl="0"/>
-            <a:r>
-              <a:rPr lang="en-US"/>
-              <a:t>Click to edit Master text styles</a:t>
-            </a:r>
-          </a:p>
-          <a:p>
-            <a:pPr lvl="1"/>
-            <a:r>
-              <a:rPr lang="en-US"/>
-              <a:t>Second level</a:t>
-            </a:r>
-          </a:p>
-          <a:p>
-            <a:pPr lvl="2"/>
-            <a:r>
-              <a:rPr lang="en-US"/>
-              <a:t>Third level</a:t>
-            </a:r>
-          </a:p>
-          <a:p>
-            <a:pPr lvl="3"/>
-            <a:r>
-              <a:rPr lang="en-US"/>
-              <a:t>Fourth level</a:t>
-            </a:r>
-          </a:p>
-          <a:p>
-            <a:pPr lvl="4"/>
-            <a:r>
-              <a:rPr lang="en-US"/>
-              <a:t>Fifth level</a:t>
-            </a:r>
-          </a:p>
-        </p:txBody>
-      </p:sp>
-      <p:sp>
-        <p:nvSpPr>
-          <p:cNvPr id="6" name="Footer Placeholder 5"/>
-          <p:cNvSpPr>
-            <a:spLocks noGrp="1"/>
-          </p:cNvSpPr>
-          <p:nvPr>
-            <p:ph type="ftr" sz="quarter" idx="4"/>
-          </p:nvPr>
-        </p:nvSpPr>
-        <p:spPr>
-          <a:xfrm>
-            <a:off x="0" y="8685213"/>
-            <a:ext cx="2971800" cy="458787"/>
-          </a:xfrm>
-          <a:prstGeom prst="rect">
-            <a:avLst/>
-          </a:prstGeom>
-        </p:spPr>
-        <p:txBody>
-          <a:bodyPr vert="horz" lIns="91440" tIns="45720" rIns="91440" bIns="45720" rtlCol="0" anchor="b"/>
-          <a:lstStyle>
-            <a:lvl1pPr algn="l">
-              <a:defRPr sz="1200"/>
-            </a:lvl1pPr>
-          </a:lstStyle>
-          <a:p>
-            <a:endParaRPr lang="en-US"/>
-          </a:p>
-        </p:txBody>
-      </p:sp>
-      <p:sp>
-        <p:nvSpPr>
-          <p:cNvPr id="7" name="Slide Number Placeholder 6"/>
-          <p:cNvSpPr>
-            <a:spLocks noGrp="1"/>
-          </p:cNvSpPr>
-          <p:nvPr>
-            <p:ph type="sldNum" sz="quarter" idx="5"/>
-          </p:nvPr>
-        </p:nvSpPr>
-        <p:spPr>
-          <a:xfrm>
-            <a:off x="3884613" y="8685213"/>
-            <a:ext cx="2971800" cy="458787"/>
-          </a:xfrm>
-          <a:prstGeom prst="rect">
-            <a:avLst/>
-          </a:prstGeom>
-        </p:spPr>
-        <p:txBody>
-          <a:bodyPr vert="horz" lIns="91440" tIns="45720" rIns="91440" bIns="45720" rtlCol="0" anchor="b"/>
-          <a:lstStyle>
-            <a:lvl1pPr algn="r">
-              <a:defRPr sz="1200"/>
-            </a:lvl1pPr>
-          </a:lstStyle>
-          <a:p>
-            <a:fld id="{CE5E9CC1-C706-0F49-92D6-E571CC5EEA8F}" type="slidenum">
-              <a:rPr lang="en-US"/>
-              <a:t>‹#›</a:t>
-            </a:fld>
-            <a:endParaRPr lang="en-US"/>
-          </a:p>
-        </p:txBody>
-      </p:sp>
     </p:spTree>
     <p:extLst>
       <p:ext uri="{BB962C8B-B14F-4D97-AF65-F5344CB8AC3E}">
-        <p14:creationId xmlns:p14="http://schemas.microsoft.com/office/powerpoint/2010/main" val="1024086991"/>
+        <p14:creationId xmlns:p14="http://schemas.microsoft.com/office/powerpoint/2010/main" val="1285309333"/>
       </p:ext>
     </p:extLst>
   </p:cSld>
@@ -509,10 +290,6 @@
           <a:bodyPr/>
           <a:lstStyle/>
           <a:p>
-            <a:r>
-              <a:rPr lang="en-US" dirty="0"/>
-              <a:t/>
-            </a:r>
             <a:endParaRPr lang="en-US" dirty="0"/>
           </a:p>
         </p:txBody>
@@ -597,10 +374,6 @@
           <a:bodyPr/>
           <a:lstStyle/>
           <a:p>
-            <a:r>
-              <a:rPr lang="en-US" dirty="0"/>
-              <a:t/>
-            </a:r>
             <a:endParaRPr lang="en-US" dirty="0"/>
           </a:p>
         </p:txBody>
@@ -685,10 +458,6 @@
           <a:bodyPr/>
           <a:lstStyle/>
           <a:p>
-            <a:r>
-              <a:rPr lang="en-US" dirty="0"/>
-              <a:t/>
-            </a:r>
             <a:endParaRPr lang="en-US" dirty="0"/>
           </a:p>
         </p:txBody>
@@ -773,10 +542,6 @@
           <a:bodyPr/>
           <a:lstStyle/>
           <a:p>
-            <a:r>
-              <a:rPr lang="en-US" dirty="0"/>
-              <a:t/>
-            </a:r>
             <a:endParaRPr lang="en-US" dirty="0"/>
           </a:p>
         </p:txBody>
@@ -861,10 +626,6 @@
           <a:bodyPr/>
           <a:lstStyle/>
           <a:p>
-            <a:r>
-              <a:rPr lang="en-US" dirty="0"/>
-              <a:t/>
-            </a:r>
             <a:endParaRPr lang="en-US" dirty="0"/>
           </a:p>
         </p:txBody>
@@ -949,10 +710,6 @@
           <a:bodyPr/>
           <a:lstStyle/>
           <a:p>
-            <a:r>
-              <a:rPr lang="en-US" dirty="0"/>
-              <a:t/>
-            </a:r>
             <a:endParaRPr lang="en-US" dirty="0"/>
           </a:p>
         </p:txBody>
@@ -1037,10 +794,6 @@
           <a:bodyPr/>
           <a:lstStyle/>
           <a:p>
-            <a:r>
-              <a:rPr lang="en-US" dirty="0"/>
-              <a:t/>
-            </a:r>
             <a:endParaRPr lang="en-US" dirty="0"/>
           </a:p>
         </p:txBody>
@@ -1125,10 +878,6 @@
           <a:bodyPr/>
           <a:lstStyle/>
           <a:p>
-            <a:r>
-              <a:rPr lang="en-US" dirty="0"/>
-              <a:t/>
-            </a:r>
             <a:endParaRPr lang="en-US" dirty="0"/>
           </a:p>
         </p:txBody>
@@ -1213,10 +962,6 @@
           <a:bodyPr/>
           <a:lstStyle/>
           <a:p>
-            <a:r>
-              <a:rPr lang="en-US" dirty="0"/>
-              <a:t/>
-            </a:r>
             <a:endParaRPr lang="en-US" dirty="0"/>
           </a:p>
         </p:txBody>
@@ -1301,10 +1046,6 @@
           <a:bodyPr/>
           <a:lstStyle/>
           <a:p>
-            <a:r>
-              <a:rPr lang="en-US" dirty="0"/>
-              <a:t/>
-            </a:r>
             <a:endParaRPr lang="en-US" dirty="0"/>
           </a:p>
         </p:txBody>
@@ -1378,6 +1119,11 @@
 <file path=ppt/slideMasters/slideMaster1.xml><?xml version="1.0" encoding="utf-8"?>
 <p:sldMaster xmlns:a="http://schemas.openxmlformats.org/drawingml/2006/main" xmlns:r="http://schemas.openxmlformats.org/officeDocument/2006/relationships" xmlns:p="http://schemas.openxmlformats.org/presentationml/2006/main">
   <p:cSld>
+    <p:bg>
+      <p:bgRef idx="1001">
+        <a:schemeClr val="bg1"/>
+      </p:bgRef>
+    </p:bg>
     <p:spTree>
       <p:nvGrpSpPr>
         <p:cNvPr id="1" name=""/>
@@ -1660,6 +1406,7 @@
         <a:solidFill>
           <a:srgbClr val="FFFFFF"/>
         </a:solidFill>
+        <a:effectLst/>
       </p:bgPr>
     </p:bg>
     <p:spTree>
@@ -1695,6 +1442,13 @@
           </a:solidFill>
           <a:ln/>
         </p:spPr>
+        <p:txBody>
+          <a:bodyPr/>
+          <a:lstStyle/>
+          <a:p>
+            <a:endParaRPr lang="en-IN"/>
+          </a:p>
+        </p:txBody>
       </p:sp>
       <p:sp>
         <p:nvSpPr>
@@ -1717,7 +1471,7 @@
           <a:bodyPr wrap="square" rtlCol="0" anchor="ctr"/>
           <a:lstStyle/>
           <a:p>
-            <a:pPr indent="0" marL="0">
+            <a:pPr marL="0" indent="0">
               <a:buNone/>
             </a:pPr>
             <a:r>
@@ -1756,7 +1510,7 @@
           <a:bodyPr wrap="square" rtlCol="0" anchor="ctr"/>
           <a:lstStyle/>
           <a:p>
-            <a:pPr indent="0" marL="0">
+            <a:pPr marL="0" indent="0">
               <a:buNone/>
             </a:pPr>
             <a:r>
@@ -1795,7 +1549,7 @@
           <a:bodyPr wrap="square" rtlCol="0" anchor="ctr"/>
           <a:lstStyle/>
           <a:p>
-            <a:pPr indent="0" marL="0">
+            <a:pPr marL="0" indent="0">
               <a:buNone/>
             </a:pPr>
             <a:r>
@@ -1834,7 +1588,7 @@
           <a:bodyPr wrap="square" rtlCol="0" anchor="ctr"/>
           <a:lstStyle/>
           <a:p>
-            <a:pPr indent="0" marL="0">
+            <a:pPr marL="0" indent="0">
               <a:buNone/>
             </a:pPr>
             <a:r>
@@ -1849,6 +1603,69 @@
               <a:t>Naviotech Solution Pvt. Ltd.  |  Cybersecurity Internship  |  August 2026</a:t>
             </a:r>
             <a:endParaRPr lang="en-US" sz="1400" dirty="0"/>
+          </a:p>
+        </p:txBody>
+      </p:sp>
+      <p:sp>
+        <p:nvSpPr>
+          <p:cNvPr id="8" name="Text 3">
+            <a:extLst>
+              <a:ext uri="{FF2B5EF4-FFF2-40B4-BE49-F238E27FC236}">
+                <a16:creationId xmlns:a16="http://schemas.microsoft.com/office/drawing/2014/main" id="{02B69201-65D5-3A44-9F51-E526BAB0FA84}"/>
+              </a:ext>
+            </a:extLst>
+          </p:cNvPr>
+          <p:cNvSpPr/>
+          <p:nvPr/>
+        </p:nvSpPr>
+        <p:spPr>
+          <a:xfrm>
+            <a:off x="825909" y="4389120"/>
+            <a:ext cx="9301317" cy="1005840"/>
+          </a:xfrm>
+          <a:prstGeom prst="rect">
+            <a:avLst/>
+          </a:prstGeom>
+          <a:noFill/>
+          <a:ln/>
+        </p:spPr>
+        <p:txBody>
+          <a:bodyPr wrap="square" rtlCol="0" anchor="ctr"/>
+          <a:lstStyle/>
+          <a:p>
+            <a:r>
+              <a:rPr lang="en-IN" sz="2000" dirty="0">
+                <a:solidFill>
+                  <a:schemeClr val="bg1"/>
+                </a:solidFill>
+              </a:rPr>
+              <a:t>Name: Ayush Kumar Srivastava</a:t>
+            </a:r>
+          </a:p>
+          <a:p>
+            <a:r>
+              <a:rPr lang="en-IN" sz="2000" dirty="0">
+                <a:solidFill>
+                  <a:schemeClr val="bg1"/>
+                </a:solidFill>
+              </a:rPr>
+              <a:t>University Roll No.: 2500560100071 </a:t>
+            </a:r>
+          </a:p>
+          <a:p>
+            <a:r>
+              <a:rPr lang="en-IN" sz="2000" dirty="0">
+                <a:solidFill>
+                  <a:schemeClr val="bg1"/>
+                </a:solidFill>
+              </a:rPr>
+              <a:t>College: Babu Banarasi Das Northern India Institute of Technology, Lucknow             </a:t>
+            </a:r>
+            <a:endParaRPr lang="en-US" sz="2000" dirty="0">
+              <a:solidFill>
+                <a:schemeClr val="bg1"/>
+              </a:solidFill>
+            </a:endParaRPr>
           </a:p>
         </p:txBody>
       </p:sp>
@@ -1868,6 +1685,7 @@
         <a:solidFill>
           <a:srgbClr val="FFFFFF"/>
         </a:solidFill>
+        <a:effectLst/>
       </p:bgPr>
     </p:bg>
     <p:spTree>
@@ -1903,6 +1721,13 @@
           </a:solidFill>
           <a:ln/>
         </p:spPr>
+        <p:txBody>
+          <a:bodyPr/>
+          <a:lstStyle/>
+          <a:p>
+            <a:endParaRPr lang="en-IN"/>
+          </a:p>
+        </p:txBody>
       </p:sp>
       <p:sp>
         <p:nvSpPr>
@@ -1925,7 +1750,7 @@
           <a:bodyPr wrap="square" rtlCol="0" anchor="ctr"/>
           <a:lstStyle/>
           <a:p>
-            <a:pPr indent="0" marL="0">
+            <a:pPr marL="0" indent="0">
               <a:buNone/>
             </a:pPr>
             <a:r>
@@ -1964,7 +1789,7 @@
           <a:bodyPr wrap="square" rtlCol="0" anchor="t"/>
           <a:lstStyle/>
           <a:p>
-            <a:pPr indent="0" marL="0">
+            <a:pPr marL="0" indent="0">
               <a:spcAft>
                 <a:spcPts val="1200"/>
               </a:spcAft>
@@ -1985,7 +1810,7 @@
             <a:endParaRPr lang="en-US" sz="1700" dirty="0"/>
           </a:p>
           <a:p>
-            <a:pPr indent="0" marL="0">
+            <a:pPr marL="0" indent="0">
               <a:spcAft>
                 <a:spcPts val="1200"/>
               </a:spcAft>
@@ -2006,7 +1831,7 @@
             <a:endParaRPr lang="en-US" sz="1700" dirty="0"/>
           </a:p>
           <a:p>
-            <a:pPr indent="0" marL="0">
+            <a:pPr marL="0" indent="0">
               <a:spcAft>
                 <a:spcPts val="1200"/>
               </a:spcAft>
@@ -2027,7 +1852,7 @@
             <a:endParaRPr lang="en-US" sz="1700" dirty="0"/>
           </a:p>
           <a:p>
-            <a:pPr indent="0" marL="0">
+            <a:pPr marL="0" indent="0">
               <a:spcAft>
                 <a:spcPts val="1200"/>
               </a:spcAft>
@@ -2069,7 +1894,7 @@
           <a:bodyPr wrap="square" rtlCol="0" anchor="ctr"/>
           <a:lstStyle/>
           <a:p>
-            <a:pPr indent="0" marL="0">
+            <a:pPr marL="0" indent="0">
               <a:buNone/>
             </a:pPr>
             <a:r>
@@ -2108,7 +1933,7 @@
           <a:bodyPr wrap="square" rtlCol="0" anchor="ctr"/>
           <a:lstStyle/>
           <a:p>
-            <a:pPr indent="0" marL="0">
+            <a:pPr marL="0" indent="0">
               <a:buNone/>
             </a:pPr>
             <a:r>
@@ -2142,6 +1967,7 @@
         <a:solidFill>
           <a:srgbClr val="FFFFFF"/>
         </a:solidFill>
+        <a:effectLst/>
       </p:bgPr>
     </p:bg>
     <p:spTree>
@@ -2179,7 +2005,7 @@
           <a:bodyPr wrap="square" rtlCol="0" anchor="ctr"/>
           <a:lstStyle/>
           <a:p>
-            <a:pPr indent="0" marL="0">
+            <a:pPr marL="0" indent="0">
               <a:buNone/>
             </a:pPr>
             <a:r>
@@ -2216,6 +2042,13 @@
           </a:solidFill>
           <a:ln/>
         </p:spPr>
+        <p:txBody>
+          <a:bodyPr/>
+          <a:lstStyle/>
+          <a:p>
+            <a:endParaRPr lang="en-IN"/>
+          </a:p>
+        </p:txBody>
       </p:sp>
       <p:sp>
         <p:nvSpPr>
@@ -2238,7 +2071,7 @@
           <a:bodyPr wrap="square" rtlCol="0" anchor="t"/>
           <a:lstStyle/>
           <a:p>
-            <a:pPr indent="0" marL="0">
+            <a:pPr marL="0" indent="0">
               <a:buNone/>
             </a:pPr>
             <a:r>
@@ -2256,7 +2089,7 @@
             <a:endParaRPr lang="en-US" sz="1800" dirty="0"/>
           </a:p>
           <a:p>
-            <a:pPr indent="0" marL="0">
+            <a:pPr marL="0" indent="0">
               <a:buNone/>
             </a:pPr>
             <a:r>
@@ -2274,7 +2107,7 @@
             <a:endParaRPr lang="en-US" sz="1800" dirty="0"/>
           </a:p>
           <a:p>
-            <a:pPr indent="0" marL="0">
+            <a:pPr marL="0" indent="0">
               <a:buNone/>
             </a:pPr>
             <a:r>
@@ -2292,7 +2125,7 @@
             <a:endParaRPr lang="en-US" sz="1800" dirty="0"/>
           </a:p>
           <a:p>
-            <a:pPr indent="0" marL="0">
+            <a:pPr marL="0" indent="0">
               <a:buNone/>
             </a:pPr>
             <a:r>
@@ -2310,7 +2143,7 @@
             <a:endParaRPr lang="en-US" sz="1800" dirty="0"/>
           </a:p>
           <a:p>
-            <a:pPr indent="0" marL="0">
+            <a:pPr marL="0" indent="0">
               <a:buNone/>
             </a:pPr>
             <a:r>
@@ -2349,7 +2182,7 @@
           <a:bodyPr wrap="square" rtlCol="0" anchor="ctr"/>
           <a:lstStyle/>
           <a:p>
-            <a:pPr indent="0" marL="0">
+            <a:pPr marL="0" indent="0">
               <a:buNone/>
             </a:pPr>
             <a:r>
@@ -2388,7 +2221,7 @@
           <a:bodyPr wrap="square" rtlCol="0" anchor="ctr"/>
           <a:lstStyle/>
           <a:p>
-            <a:pPr algn="r" indent="0" marL="0">
+            <a:pPr marL="0" indent="0" algn="r">
               <a:buNone/>
             </a:pPr>
             <a:r>
@@ -2422,6 +2255,7 @@
         <a:solidFill>
           <a:srgbClr val="FFFFFF"/>
         </a:solidFill>
+        <a:effectLst/>
       </p:bgPr>
     </p:bg>
     <p:spTree>
@@ -2459,7 +2293,7 @@
           <a:bodyPr wrap="square" rtlCol="0" anchor="ctr"/>
           <a:lstStyle/>
           <a:p>
-            <a:pPr indent="0" marL="0">
+            <a:pPr marL="0" indent="0">
               <a:buNone/>
             </a:pPr>
             <a:r>
@@ -2503,6 +2337,13 @@
             <a:prstDash val="solid"/>
           </a:ln>
         </p:spPr>
+        <p:txBody>
+          <a:bodyPr/>
+          <a:lstStyle/>
+          <a:p>
+            <a:endParaRPr lang="en-IN"/>
+          </a:p>
+        </p:txBody>
       </p:sp>
       <p:sp>
         <p:nvSpPr>
@@ -2523,6 +2364,13 @@
           </a:solidFill>
           <a:ln/>
         </p:spPr>
+        <p:txBody>
+          <a:bodyPr/>
+          <a:lstStyle/>
+          <a:p>
+            <a:endParaRPr lang="en-IN"/>
+          </a:p>
+        </p:txBody>
       </p:sp>
       <p:sp>
         <p:nvSpPr>
@@ -2545,7 +2393,7 @@
           <a:bodyPr wrap="square" rtlCol="0" anchor="ctr"/>
           <a:lstStyle/>
           <a:p>
-            <a:pPr algn="ctr" indent="0" marL="0">
+            <a:pPr marL="0" indent="0" algn="ctr">
               <a:buNone/>
             </a:pPr>
             <a:r>
@@ -2584,7 +2432,7 @@
           <a:bodyPr wrap="square" rtlCol="0" anchor="ctr"/>
           <a:lstStyle/>
           <a:p>
-            <a:pPr indent="0" marL="0">
+            <a:pPr marL="0" indent="0">
               <a:buNone/>
             </a:pPr>
             <a:r>
@@ -2628,6 +2476,13 @@
             <a:prstDash val="solid"/>
           </a:ln>
         </p:spPr>
+        <p:txBody>
+          <a:bodyPr/>
+          <a:lstStyle/>
+          <a:p>
+            <a:endParaRPr lang="en-IN"/>
+          </a:p>
+        </p:txBody>
       </p:sp>
       <p:sp>
         <p:nvSpPr>
@@ -2648,6 +2503,13 @@
           </a:solidFill>
           <a:ln/>
         </p:spPr>
+        <p:txBody>
+          <a:bodyPr/>
+          <a:lstStyle/>
+          <a:p>
+            <a:endParaRPr lang="en-IN"/>
+          </a:p>
+        </p:txBody>
       </p:sp>
       <p:sp>
         <p:nvSpPr>
@@ -2670,7 +2532,7 @@
           <a:bodyPr wrap="square" rtlCol="0" anchor="ctr"/>
           <a:lstStyle/>
           <a:p>
-            <a:pPr algn="ctr" indent="0" marL="0">
+            <a:pPr marL="0" indent="0" algn="ctr">
               <a:buNone/>
             </a:pPr>
             <a:r>
@@ -2709,7 +2571,7 @@
           <a:bodyPr wrap="square" rtlCol="0" anchor="ctr"/>
           <a:lstStyle/>
           <a:p>
-            <a:pPr indent="0" marL="0">
+            <a:pPr marL="0" indent="0">
               <a:buNone/>
             </a:pPr>
             <a:r>
@@ -2753,6 +2615,13 @@
             <a:prstDash val="solid"/>
           </a:ln>
         </p:spPr>
+        <p:txBody>
+          <a:bodyPr/>
+          <a:lstStyle/>
+          <a:p>
+            <a:endParaRPr lang="en-IN"/>
+          </a:p>
+        </p:txBody>
       </p:sp>
       <p:sp>
         <p:nvSpPr>
@@ -2773,6 +2642,13 @@
           </a:solidFill>
           <a:ln/>
         </p:spPr>
+        <p:txBody>
+          <a:bodyPr/>
+          <a:lstStyle/>
+          <a:p>
+            <a:endParaRPr lang="en-IN"/>
+          </a:p>
+        </p:txBody>
       </p:sp>
       <p:sp>
         <p:nvSpPr>
@@ -2795,7 +2671,7 @@
           <a:bodyPr wrap="square" rtlCol="0" anchor="ctr"/>
           <a:lstStyle/>
           <a:p>
-            <a:pPr algn="ctr" indent="0" marL="0">
+            <a:pPr marL="0" indent="0" algn="ctr">
               <a:buNone/>
             </a:pPr>
             <a:r>
@@ -2834,7 +2710,7 @@
           <a:bodyPr wrap="square" rtlCol="0" anchor="ctr"/>
           <a:lstStyle/>
           <a:p>
-            <a:pPr indent="0" marL="0">
+            <a:pPr marL="0" indent="0">
               <a:buNone/>
             </a:pPr>
             <a:r>
@@ -2878,6 +2754,13 @@
             <a:prstDash val="solid"/>
           </a:ln>
         </p:spPr>
+        <p:txBody>
+          <a:bodyPr/>
+          <a:lstStyle/>
+          <a:p>
+            <a:endParaRPr lang="en-IN"/>
+          </a:p>
+        </p:txBody>
       </p:sp>
       <p:sp>
         <p:nvSpPr>
@@ -2898,6 +2781,13 @@
           </a:solidFill>
           <a:ln/>
         </p:spPr>
+        <p:txBody>
+          <a:bodyPr/>
+          <a:lstStyle/>
+          <a:p>
+            <a:endParaRPr lang="en-IN"/>
+          </a:p>
+        </p:txBody>
       </p:sp>
       <p:sp>
         <p:nvSpPr>
@@ -2920,7 +2810,7 @@
           <a:bodyPr wrap="square" rtlCol="0" anchor="ctr"/>
           <a:lstStyle/>
           <a:p>
-            <a:pPr algn="ctr" indent="0" marL="0">
+            <a:pPr marL="0" indent="0" algn="ctr">
               <a:buNone/>
             </a:pPr>
             <a:r>
@@ -2959,7 +2849,7 @@
           <a:bodyPr wrap="square" rtlCol="0" anchor="ctr"/>
           <a:lstStyle/>
           <a:p>
-            <a:pPr indent="0" marL="0">
+            <a:pPr marL="0" indent="0">
               <a:buNone/>
             </a:pPr>
             <a:r>
@@ -3003,6 +2893,13 @@
             <a:prstDash val="solid"/>
           </a:ln>
         </p:spPr>
+        <p:txBody>
+          <a:bodyPr/>
+          <a:lstStyle/>
+          <a:p>
+            <a:endParaRPr lang="en-IN"/>
+          </a:p>
+        </p:txBody>
       </p:sp>
       <p:sp>
         <p:nvSpPr>
@@ -3023,6 +2920,13 @@
           </a:solidFill>
           <a:ln/>
         </p:spPr>
+        <p:txBody>
+          <a:bodyPr/>
+          <a:lstStyle/>
+          <a:p>
+            <a:endParaRPr lang="en-IN"/>
+          </a:p>
+        </p:txBody>
       </p:sp>
       <p:sp>
         <p:nvSpPr>
@@ -3045,7 +2949,7 @@
           <a:bodyPr wrap="square" rtlCol="0" anchor="ctr"/>
           <a:lstStyle/>
           <a:p>
-            <a:pPr algn="ctr" indent="0" marL="0">
+            <a:pPr marL="0" indent="0" algn="ctr">
               <a:buNone/>
             </a:pPr>
             <a:r>
@@ -3084,7 +2988,7 @@
           <a:bodyPr wrap="square" rtlCol="0" anchor="ctr"/>
           <a:lstStyle/>
           <a:p>
-            <a:pPr indent="0" marL="0">
+            <a:pPr marL="0" indent="0">
               <a:buNone/>
             </a:pPr>
             <a:r>
@@ -3123,7 +3027,7 @@
           <a:bodyPr wrap="square" rtlCol="0" anchor="ctr"/>
           <a:lstStyle/>
           <a:p>
-            <a:pPr indent="0" marL="0">
+            <a:pPr marL="0" indent="0">
               <a:buNone/>
             </a:pPr>
             <a:r>
@@ -3162,7 +3066,7 @@
           <a:bodyPr wrap="square" rtlCol="0" anchor="ctr"/>
           <a:lstStyle/>
           <a:p>
-            <a:pPr algn="r" indent="0" marL="0">
+            <a:pPr marL="0" indent="0" algn="r">
               <a:buNone/>
             </a:pPr>
             <a:r>
@@ -3196,6 +3100,7 @@
         <a:solidFill>
           <a:srgbClr val="FFFFFF"/>
         </a:solidFill>
+        <a:effectLst/>
       </p:bgPr>
     </p:bg>
     <p:spTree>
@@ -3233,7 +3138,7 @@
           <a:bodyPr wrap="square" rtlCol="0" anchor="ctr"/>
           <a:lstStyle/>
           <a:p>
-            <a:pPr indent="0" marL="0">
+            <a:pPr marL="0" indent="0">
               <a:buNone/>
             </a:pPr>
             <a:r>
@@ -3270,6 +3175,13 @@
           </a:solidFill>
           <a:ln/>
         </p:spPr>
+        <p:txBody>
+          <a:bodyPr/>
+          <a:lstStyle/>
+          <a:p>
+            <a:endParaRPr lang="en-IN"/>
+          </a:p>
+        </p:txBody>
       </p:sp>
       <p:sp>
         <p:nvSpPr>
@@ -3292,7 +3204,7 @@
           <a:bodyPr wrap="square" rtlCol="0" anchor="ctr"/>
           <a:lstStyle/>
           <a:p>
-            <a:pPr algn="ctr" indent="0" marL="0">
+            <a:pPr marL="0" indent="0" algn="ctr">
               <a:buNone/>
             </a:pPr>
             <a:r>
@@ -3309,7 +3221,7 @@
             <a:endParaRPr lang="en-US" sz="1300" dirty="0"/>
           </a:p>
           <a:p>
-            <a:pPr algn="ctr" indent="0" marL="0">
+            <a:pPr marL="0" indent="0" algn="ctr">
               <a:buNone/>
             </a:pPr>
             <a:r>
@@ -3348,7 +3260,7 @@
           <a:bodyPr wrap="square" rtlCol="0" anchor="t"/>
           <a:lstStyle/>
           <a:p>
-            <a:pPr algn="ctr" indent="0" marL="0">
+            <a:pPr marL="0" indent="0" algn="ctr">
               <a:buNone/>
             </a:pPr>
             <a:r>
@@ -3365,7 +3277,7 @@
             <a:endParaRPr lang="en-US" sz="1100" dirty="0"/>
           </a:p>
           <a:p>
-            <a:pPr algn="ctr" indent="0" marL="0">
+            <a:pPr marL="0" indent="0" algn="ctr">
               <a:buNone/>
             </a:pPr>
             <a:r>
@@ -3402,6 +3314,13 @@
           </a:solidFill>
           <a:ln/>
         </p:spPr>
+        <p:txBody>
+          <a:bodyPr/>
+          <a:lstStyle/>
+          <a:p>
+            <a:endParaRPr lang="en-IN"/>
+          </a:p>
+        </p:txBody>
       </p:sp>
       <p:sp>
         <p:nvSpPr>
@@ -3424,7 +3343,7 @@
           <a:bodyPr wrap="square" rtlCol="0" anchor="ctr"/>
           <a:lstStyle/>
           <a:p>
-            <a:pPr algn="ctr" indent="0" marL="0">
+            <a:pPr marL="0" indent="0" algn="ctr">
               <a:buNone/>
             </a:pPr>
             <a:r>
@@ -3441,7 +3360,7 @@
             <a:endParaRPr lang="en-US" sz="1300" dirty="0"/>
           </a:p>
           <a:p>
-            <a:pPr algn="ctr" indent="0" marL="0">
+            <a:pPr marL="0" indent="0" algn="ctr">
               <a:buNone/>
             </a:pPr>
             <a:r>
@@ -3480,7 +3399,7 @@
           <a:bodyPr wrap="square" rtlCol="0" anchor="t"/>
           <a:lstStyle/>
           <a:p>
-            <a:pPr algn="ctr" indent="0" marL="0">
+            <a:pPr marL="0" indent="0" algn="ctr">
               <a:buNone/>
             </a:pPr>
             <a:r>
@@ -3497,7 +3416,7 @@
             <a:endParaRPr lang="en-US" sz="1100" dirty="0"/>
           </a:p>
           <a:p>
-            <a:pPr algn="ctr" indent="0" marL="0">
+            <a:pPr marL="0" indent="0" algn="ctr">
               <a:buNone/>
             </a:pPr>
             <a:r>
@@ -3534,6 +3453,13 @@
           </a:solidFill>
           <a:ln/>
         </p:spPr>
+        <p:txBody>
+          <a:bodyPr/>
+          <a:lstStyle/>
+          <a:p>
+            <a:endParaRPr lang="en-IN"/>
+          </a:p>
+        </p:txBody>
       </p:sp>
       <p:sp>
         <p:nvSpPr>
@@ -3556,7 +3482,7 @@
           <a:bodyPr wrap="square" rtlCol="0" anchor="ctr"/>
           <a:lstStyle/>
           <a:p>
-            <a:pPr algn="ctr" indent="0" marL="0">
+            <a:pPr marL="0" indent="0" algn="ctr">
               <a:buNone/>
             </a:pPr>
             <a:r>
@@ -3595,7 +3521,7 @@
           <a:bodyPr wrap="square" rtlCol="0" anchor="t"/>
           <a:lstStyle/>
           <a:p>
-            <a:pPr algn="ctr" indent="0" marL="0">
+            <a:pPr marL="0" indent="0" algn="ctr">
               <a:buNone/>
             </a:pPr>
             <a:r>
@@ -3612,7 +3538,7 @@
             <a:endParaRPr lang="en-US" sz="1100" dirty="0"/>
           </a:p>
           <a:p>
-            <a:pPr algn="ctr" indent="0" marL="0">
+            <a:pPr marL="0" indent="0" algn="ctr">
               <a:buNone/>
             </a:pPr>
             <a:r>
@@ -3649,6 +3575,13 @@
           </a:solidFill>
           <a:ln/>
         </p:spPr>
+        <p:txBody>
+          <a:bodyPr/>
+          <a:lstStyle/>
+          <a:p>
+            <a:endParaRPr lang="en-IN"/>
+          </a:p>
+        </p:txBody>
       </p:sp>
       <p:sp>
         <p:nvSpPr>
@@ -3671,7 +3604,7 @@
           <a:bodyPr wrap="square" rtlCol="0" anchor="ctr"/>
           <a:lstStyle/>
           <a:p>
-            <a:pPr algn="ctr" indent="0" marL="0">
+            <a:pPr marL="0" indent="0" algn="ctr">
               <a:buNone/>
             </a:pPr>
             <a:r>
@@ -3688,7 +3621,7 @@
             <a:endParaRPr lang="en-US" sz="1300" dirty="0"/>
           </a:p>
           <a:p>
-            <a:pPr algn="ctr" indent="0" marL="0">
+            <a:pPr marL="0" indent="0" algn="ctr">
               <a:buNone/>
             </a:pPr>
             <a:r>
@@ -3727,7 +3660,7 @@
           <a:bodyPr wrap="square" rtlCol="0" anchor="t"/>
           <a:lstStyle/>
           <a:p>
-            <a:pPr algn="ctr" indent="0" marL="0">
+            <a:pPr marL="0" indent="0" algn="ctr">
               <a:buNone/>
             </a:pPr>
             <a:r>
@@ -3744,7 +3677,7 @@
             <a:endParaRPr lang="en-US" sz="1100" dirty="0"/>
           </a:p>
           <a:p>
-            <a:pPr algn="ctr" indent="0" marL="0">
+            <a:pPr marL="0" indent="0" algn="ctr">
               <a:buNone/>
             </a:pPr>
             <a:r>
@@ -3781,6 +3714,13 @@
           </a:solidFill>
           <a:ln/>
         </p:spPr>
+        <p:txBody>
+          <a:bodyPr/>
+          <a:lstStyle/>
+          <a:p>
+            <a:endParaRPr lang="en-IN"/>
+          </a:p>
+        </p:txBody>
       </p:sp>
       <p:sp>
         <p:nvSpPr>
@@ -3803,7 +3743,7 @@
           <a:bodyPr wrap="square" rtlCol="0" anchor="ctr"/>
           <a:lstStyle/>
           <a:p>
-            <a:pPr algn="ctr" indent="0" marL="0">
+            <a:pPr marL="0" indent="0" algn="ctr">
               <a:buNone/>
             </a:pPr>
             <a:r>
@@ -3820,7 +3760,7 @@
             <a:endParaRPr lang="en-US" sz="1300" dirty="0"/>
           </a:p>
           <a:p>
-            <a:pPr algn="ctr" indent="0" marL="0">
+            <a:pPr marL="0" indent="0" algn="ctr">
               <a:buNone/>
             </a:pPr>
             <a:r>
@@ -3859,7 +3799,7 @@
           <a:bodyPr wrap="square" rtlCol="0" anchor="t"/>
           <a:lstStyle/>
           <a:p>
-            <a:pPr algn="ctr" indent="0" marL="0">
+            <a:pPr marL="0" indent="0" algn="ctr">
               <a:buNone/>
             </a:pPr>
             <a:r>
@@ -3876,7 +3816,7 @@
             <a:endParaRPr lang="en-US" sz="1100" dirty="0"/>
           </a:p>
           <a:p>
-            <a:pPr algn="ctr" indent="0" marL="0">
+            <a:pPr marL="0" indent="0" algn="ctr">
               <a:buNone/>
             </a:pPr>
             <a:r>
@@ -3915,7 +3855,7 @@
           <a:bodyPr wrap="square" rtlCol="0" anchor="ctr"/>
           <a:lstStyle/>
           <a:p>
-            <a:pPr indent="0" marL="0">
+            <a:pPr marL="0" indent="0">
               <a:buNone/>
             </a:pPr>
             <a:r>
@@ -3954,7 +3894,7 @@
           <a:bodyPr wrap="square" rtlCol="0" anchor="ctr"/>
           <a:lstStyle/>
           <a:p>
-            <a:pPr algn="r" indent="0" marL="0">
+            <a:pPr marL="0" indent="0" algn="r">
               <a:buNone/>
             </a:pPr>
             <a:r>
@@ -3988,6 +3928,7 @@
         <a:solidFill>
           <a:srgbClr val="FFFFFF"/>
         </a:solidFill>
+        <a:effectLst/>
       </p:bgPr>
     </p:bg>
     <p:spTree>
@@ -4025,7 +3966,7 @@
           <a:bodyPr wrap="square" rtlCol="0" anchor="ctr"/>
           <a:lstStyle/>
           <a:p>
-            <a:pPr indent="0" marL="0">
+            <a:pPr marL="0" indent="0">
               <a:buNone/>
             </a:pPr>
             <a:r>
@@ -4062,6 +4003,13 @@
           </a:solidFill>
           <a:ln/>
         </p:spPr>
+        <p:txBody>
+          <a:bodyPr/>
+          <a:lstStyle/>
+          <a:p>
+            <a:endParaRPr lang="en-IN"/>
+          </a:p>
+        </p:txBody>
       </p:sp>
       <p:sp>
         <p:nvSpPr>
@@ -4084,7 +4032,7 @@
           <a:bodyPr wrap="square" rtlCol="0" anchor="ctr"/>
           <a:lstStyle/>
           <a:p>
-            <a:pPr indent="0" marL="0">
+            <a:pPr marL="0" indent="0">
               <a:buNone/>
             </a:pPr>
             <a:r>
@@ -4274,6 +4222,13 @@
           </a:solidFill>
           <a:ln/>
         </p:spPr>
+        <p:txBody>
+          <a:bodyPr/>
+          <a:lstStyle/>
+          <a:p>
+            <a:endParaRPr lang="en-IN"/>
+          </a:p>
+        </p:txBody>
       </p:sp>
       <p:sp>
         <p:nvSpPr>
@@ -4296,7 +4251,7 @@
           <a:bodyPr wrap="square" rtlCol="0" anchor="ctr"/>
           <a:lstStyle/>
           <a:p>
-            <a:pPr indent="0" marL="0">
+            <a:pPr marL="0" indent="0">
               <a:buNone/>
             </a:pPr>
             <a:r>
@@ -4466,7 +4421,7 @@
           <a:bodyPr wrap="square" rtlCol="0" anchor="ctr"/>
           <a:lstStyle/>
           <a:p>
-            <a:pPr indent="0" marL="0">
+            <a:pPr marL="0" indent="0">
               <a:buNone/>
             </a:pPr>
             <a:r>
@@ -4505,7 +4460,7 @@
           <a:bodyPr wrap="square" rtlCol="0" anchor="ctr"/>
           <a:lstStyle/>
           <a:p>
-            <a:pPr algn="r" indent="0" marL="0">
+            <a:pPr marL="0" indent="0" algn="r">
               <a:buNone/>
             </a:pPr>
             <a:r>
@@ -4539,6 +4494,7 @@
         <a:solidFill>
           <a:srgbClr val="FFFFFF"/>
         </a:solidFill>
+        <a:effectLst/>
       </p:bgPr>
     </p:bg>
     <p:spTree>
@@ -4576,7 +4532,7 @@
           <a:bodyPr wrap="square" rtlCol="0" anchor="ctr"/>
           <a:lstStyle/>
           <a:p>
-            <a:pPr indent="0" marL="0">
+            <a:pPr marL="0" indent="0">
               <a:buNone/>
             </a:pPr>
             <a:r>
@@ -4615,7 +4571,7 @@
           <a:bodyPr wrap="square" rtlCol="0" anchor="ctr"/>
           <a:lstStyle/>
           <a:p>
-            <a:pPr indent="0" marL="0">
+            <a:pPr marL="0" indent="0">
               <a:buNone/>
             </a:pPr>
             <a:r>
@@ -4656,7 +4612,7 @@
           <a:bodyPr wrap="square" rtlCol="0" anchor="ctr"/>
           <a:lstStyle/>
           <a:p>
-            <a:pPr indent="0" marL="0">
+            <a:pPr marL="0" indent="0">
               <a:buNone/>
             </a:pPr>
             <a:r>
@@ -4695,7 +4651,7 @@
           <a:bodyPr wrap="square" rtlCol="0" anchor="ctr"/>
           <a:lstStyle/>
           <a:p>
-            <a:pPr indent="0" marL="0">
+            <a:pPr marL="0" indent="0">
               <a:buNone/>
             </a:pPr>
             <a:r>
@@ -4734,7 +4690,7 @@
           <a:bodyPr wrap="square" rtlCol="0" anchor="ctr"/>
           <a:lstStyle/>
           <a:p>
-            <a:pPr indent="0" marL="0">
+            <a:pPr marL="0" indent="0">
               <a:buNone/>
             </a:pPr>
             <a:r>
@@ -4773,7 +4729,7 @@
           <a:bodyPr wrap="square" rtlCol="0" anchor="ctr"/>
           <a:lstStyle/>
           <a:p>
-            <a:pPr indent="0" marL="0">
+            <a:pPr marL="0" indent="0">
               <a:buNone/>
             </a:pPr>
             <a:r>
@@ -4812,7 +4768,7 @@
           <a:bodyPr wrap="square" rtlCol="0" anchor="ctr"/>
           <a:lstStyle/>
           <a:p>
-            <a:pPr indent="0" marL="0">
+            <a:pPr marL="0" indent="0">
               <a:buNone/>
             </a:pPr>
             <a:r>
@@ -4851,7 +4807,7 @@
           <a:bodyPr wrap="square" rtlCol="0" anchor="ctr"/>
           <a:lstStyle/>
           <a:p>
-            <a:pPr indent="0" marL="0">
+            <a:pPr marL="0" indent="0">
               <a:buNone/>
             </a:pPr>
             <a:r>
@@ -4890,7 +4846,7 @@
           <a:bodyPr wrap="square" rtlCol="0" anchor="ctr"/>
           <a:lstStyle/>
           <a:p>
-            <a:pPr indent="0" marL="0">
+            <a:pPr marL="0" indent="0">
               <a:buNone/>
             </a:pPr>
             <a:r>
@@ -4929,7 +4885,7 @@
           <a:bodyPr wrap="square" rtlCol="0" anchor="ctr"/>
           <a:lstStyle/>
           <a:p>
-            <a:pPr algn="r" indent="0" marL="0">
+            <a:pPr marL="0" indent="0" algn="r">
               <a:buNone/>
             </a:pPr>
             <a:r>
@@ -4963,6 +4919,7 @@
         <a:solidFill>
           <a:srgbClr val="FFFFFF"/>
         </a:solidFill>
+        <a:effectLst/>
       </p:bgPr>
     </p:bg>
     <p:spTree>
@@ -5000,7 +4957,7 @@
           <a:bodyPr wrap="square" rtlCol="0" anchor="ctr"/>
           <a:lstStyle/>
           <a:p>
-            <a:pPr indent="0" marL="0">
+            <a:pPr marL="0" indent="0">
               <a:buNone/>
             </a:pPr>
             <a:r>
@@ -5041,8 +4998,20 @@
             <a:tbl>
               <a:tblPr/>
               <a:tblGrid>
-                <a:gridCol w="3017520"/>
-                <a:gridCol w="2011680"/>
+                <a:gridCol w="3017520">
+                  <a:extLst>
+                    <a:ext uri="{9D8B030D-6E8A-4147-A177-3AD203B41FA5}">
+                      <a16:colId xmlns:a16="http://schemas.microsoft.com/office/drawing/2014/main" val="20000"/>
+                    </a:ext>
+                  </a:extLst>
+                </a:gridCol>
+                <a:gridCol w="2011680">
+                  <a:extLst>
+                    <a:ext uri="{9D8B030D-6E8A-4147-A177-3AD203B41FA5}">
+                      <a16:colId xmlns:a16="http://schemas.microsoft.com/office/drawing/2014/main" val="20001"/>
+                    </a:ext>
+                  </a:extLst>
+                </a:gridCol>
               </a:tblGrid>
               <a:tr h="594360">
                 <a:tc>
@@ -5050,7 +5019,7 @@
                     <a:bodyPr/>
                     <a:lstStyle/>
                     <a:p>
-                      <a:pPr algn="l" indent="0" marL="0">
+                      <a:pPr marL="0" indent="0" algn="l">
                         <a:buNone/>
                       </a:pPr>
                       <a:r>
@@ -5071,7 +5040,7 @@
                       </a:endParaRPr>
                     </a:p>
                   </a:txBody>
-                  <a:tcPr marL="91440" marR="91440" marT="45720" marB="45720" anchor="ctr">
+                  <a:tcPr anchor="ctr">
                     <a:lnL w="6350" cap="flat" cmpd="sng" algn="ctr">
                       <a:solidFill>
                         <a:srgbClr val="DDDDDD"/>
@@ -5118,7 +5087,7 @@
                     <a:bodyPr/>
                     <a:lstStyle/>
                     <a:p>
-                      <a:pPr algn="l" indent="0" marL="0">
+                      <a:pPr marL="0" indent="0" algn="l">
                         <a:buNone/>
                       </a:pPr>
                       <a:r>
@@ -5139,7 +5108,7 @@
                       </a:endParaRPr>
                     </a:p>
                   </a:txBody>
-                  <a:tcPr marL="91440" marR="91440" marT="45720" marB="45720" anchor="ctr">
+                  <a:tcPr anchor="ctr">
                     <a:lnL w="6350" cap="flat" cmpd="sng" algn="ctr">
                       <a:solidFill>
                         <a:srgbClr val="DDDDDD"/>
@@ -5181,6 +5150,11 @@
                     </a:solidFill>
                   </a:tcPr>
                 </a:tc>
+                <a:extLst>
+                  <a:ext uri="{0D108BD9-81ED-4DB2-BD59-A6C34878D82A}">
+                    <a16:rowId xmlns:a16="http://schemas.microsoft.com/office/drawing/2014/main" val="10000"/>
+                  </a:ext>
+                </a:extLst>
               </a:tr>
               <a:tr h="594360">
                 <a:tc>
@@ -5188,7 +5162,7 @@
                     <a:bodyPr/>
                     <a:lstStyle/>
                     <a:p>
-                      <a:pPr algn="l" indent="0" marL="0">
+                      <a:pPr marL="0" indent="0" algn="l">
                         <a:buNone/>
                       </a:pPr>
                       <a:r>
@@ -5209,7 +5183,7 @@
                       </a:endParaRPr>
                     </a:p>
                   </a:txBody>
-                  <a:tcPr marL="91440" marR="91440" marT="45720" marB="45720" anchor="ctr">
+                  <a:tcPr anchor="ctr">
                     <a:lnL w="6350" cap="flat" cmpd="sng" algn="ctr">
                       <a:solidFill>
                         <a:srgbClr val="DDDDDD"/>
@@ -5253,7 +5227,7 @@
                     <a:bodyPr/>
                     <a:lstStyle/>
                     <a:p>
-                      <a:pPr algn="l" indent="0" marL="0">
+                      <a:pPr marL="0" indent="0" algn="l">
                         <a:buNone/>
                       </a:pPr>
                       <a:r>
@@ -5274,7 +5248,7 @@
                       </a:endParaRPr>
                     </a:p>
                   </a:txBody>
-                  <a:tcPr marL="91440" marR="91440" marT="45720" marB="45720" anchor="ctr">
+                  <a:tcPr anchor="ctr">
                     <a:lnL w="6350" cap="flat" cmpd="sng" algn="ctr">
                       <a:solidFill>
                         <a:srgbClr val="DDDDDD"/>
@@ -5313,6 +5287,11 @@
                     </a:lnB>
                   </a:tcPr>
                 </a:tc>
+                <a:extLst>
+                  <a:ext uri="{0D108BD9-81ED-4DB2-BD59-A6C34878D82A}">
+                    <a16:rowId xmlns:a16="http://schemas.microsoft.com/office/drawing/2014/main" val="10001"/>
+                  </a:ext>
+                </a:extLst>
               </a:tr>
               <a:tr h="594360">
                 <a:tc>
@@ -5320,7 +5299,7 @@
                     <a:bodyPr/>
                     <a:lstStyle/>
                     <a:p>
-                      <a:pPr algn="l" indent="0" marL="0">
+                      <a:pPr marL="0" indent="0" algn="l">
                         <a:buNone/>
                       </a:pPr>
                       <a:r>
@@ -5341,7 +5320,7 @@
                       </a:endParaRPr>
                     </a:p>
                   </a:txBody>
-                  <a:tcPr marL="91440" marR="91440" marT="45720" marB="45720" anchor="ctr">
+                  <a:tcPr anchor="ctr">
                     <a:lnL w="6350" cap="flat" cmpd="sng" algn="ctr">
                       <a:solidFill>
                         <a:srgbClr val="DDDDDD"/>
@@ -5385,7 +5364,7 @@
                     <a:bodyPr/>
                     <a:lstStyle/>
                     <a:p>
-                      <a:pPr algn="l" indent="0" marL="0">
+                      <a:pPr marL="0" indent="0" algn="l">
                         <a:buNone/>
                       </a:pPr>
                       <a:r>
@@ -5406,7 +5385,7 @@
                       </a:endParaRPr>
                     </a:p>
                   </a:txBody>
-                  <a:tcPr marL="91440" marR="91440" marT="45720" marB="45720" anchor="ctr">
+                  <a:tcPr anchor="ctr">
                     <a:lnL w="6350" cap="flat" cmpd="sng" algn="ctr">
                       <a:solidFill>
                         <a:srgbClr val="DDDDDD"/>
@@ -5445,6 +5424,11 @@
                     </a:lnB>
                   </a:tcPr>
                 </a:tc>
+                <a:extLst>
+                  <a:ext uri="{0D108BD9-81ED-4DB2-BD59-A6C34878D82A}">
+                    <a16:rowId xmlns:a16="http://schemas.microsoft.com/office/drawing/2014/main" val="10002"/>
+                  </a:ext>
+                </a:extLst>
               </a:tr>
               <a:tr h="594360">
                 <a:tc>
@@ -5452,7 +5436,7 @@
                     <a:bodyPr/>
                     <a:lstStyle/>
                     <a:p>
-                      <a:pPr algn="l" indent="0" marL="0">
+                      <a:pPr marL="0" indent="0" algn="l">
                         <a:buNone/>
                       </a:pPr>
                       <a:r>
@@ -5473,7 +5457,7 @@
                       </a:endParaRPr>
                     </a:p>
                   </a:txBody>
-                  <a:tcPr marL="91440" marR="91440" marT="45720" marB="45720" anchor="ctr">
+                  <a:tcPr anchor="ctr">
                     <a:lnL w="6350" cap="flat" cmpd="sng" algn="ctr">
                       <a:solidFill>
                         <a:srgbClr val="DDDDDD"/>
@@ -5517,7 +5501,7 @@
                     <a:bodyPr/>
                     <a:lstStyle/>
                     <a:p>
-                      <a:pPr algn="l" indent="0" marL="0">
+                      <a:pPr marL="0" indent="0" algn="l">
                         <a:buNone/>
                       </a:pPr>
                       <a:r>
@@ -5538,7 +5522,7 @@
                       </a:endParaRPr>
                     </a:p>
                   </a:txBody>
-                  <a:tcPr marL="91440" marR="91440" marT="45720" marB="45720" anchor="ctr">
+                  <a:tcPr anchor="ctr">
                     <a:lnL w="6350" cap="flat" cmpd="sng" algn="ctr">
                       <a:solidFill>
                         <a:srgbClr val="DDDDDD"/>
@@ -5577,6 +5561,11 @@
                     </a:lnB>
                   </a:tcPr>
                 </a:tc>
+                <a:extLst>
+                  <a:ext uri="{0D108BD9-81ED-4DB2-BD59-A6C34878D82A}">
+                    <a16:rowId xmlns:a16="http://schemas.microsoft.com/office/drawing/2014/main" val="10003"/>
+                  </a:ext>
+                </a:extLst>
               </a:tr>
               <a:tr h="594360">
                 <a:tc>
@@ -5584,7 +5573,7 @@
                     <a:bodyPr/>
                     <a:lstStyle/>
                     <a:p>
-                      <a:pPr algn="l" indent="0" marL="0">
+                      <a:pPr marL="0" indent="0" algn="l">
                         <a:buNone/>
                       </a:pPr>
                       <a:r>
@@ -5605,7 +5594,7 @@
                       </a:endParaRPr>
                     </a:p>
                   </a:txBody>
-                  <a:tcPr marL="91440" marR="91440" marT="45720" marB="45720" anchor="ctr">
+                  <a:tcPr anchor="ctr">
                     <a:lnL w="6350" cap="flat" cmpd="sng" algn="ctr">
                       <a:solidFill>
                         <a:srgbClr val="DDDDDD"/>
@@ -5649,7 +5638,7 @@
                     <a:bodyPr/>
                     <a:lstStyle/>
                     <a:p>
-                      <a:pPr algn="l" indent="0" marL="0">
+                      <a:pPr marL="0" indent="0" algn="l">
                         <a:buNone/>
                       </a:pPr>
                       <a:r>
@@ -5670,7 +5659,7 @@
                       </a:endParaRPr>
                     </a:p>
                   </a:txBody>
-                  <a:tcPr marL="91440" marR="91440" marT="45720" marB="45720" anchor="ctr">
+                  <a:tcPr anchor="ctr">
                     <a:lnL w="6350" cap="flat" cmpd="sng" algn="ctr">
                       <a:solidFill>
                         <a:srgbClr val="DDDDDD"/>
@@ -5709,6 +5698,11 @@
                     </a:lnB>
                   </a:tcPr>
                 </a:tc>
+                <a:extLst>
+                  <a:ext uri="{0D108BD9-81ED-4DB2-BD59-A6C34878D82A}">
+                    <a16:rowId xmlns:a16="http://schemas.microsoft.com/office/drawing/2014/main" val="10004"/>
+                  </a:ext>
+                </a:extLst>
               </a:tr>
               <a:tr h="594360">
                 <a:tc>
@@ -5716,7 +5710,7 @@
                     <a:bodyPr/>
                     <a:lstStyle/>
                     <a:p>
-                      <a:pPr algn="l" indent="0" marL="0">
+                      <a:pPr marL="0" indent="0" algn="l">
                         <a:buNone/>
                       </a:pPr>
                       <a:r>
@@ -5737,7 +5731,7 @@
                       </a:endParaRPr>
                     </a:p>
                   </a:txBody>
-                  <a:tcPr marL="91440" marR="91440" marT="45720" marB="45720" anchor="ctr">
+                  <a:tcPr anchor="ctr">
                     <a:lnL w="6350" cap="flat" cmpd="sng" algn="ctr">
                       <a:solidFill>
                         <a:srgbClr val="DDDDDD"/>
@@ -5781,7 +5775,7 @@
                     <a:bodyPr/>
                     <a:lstStyle/>
                     <a:p>
-                      <a:pPr algn="l" indent="0" marL="0">
+                      <a:pPr marL="0" indent="0" algn="l">
                         <a:buNone/>
                       </a:pPr>
                       <a:r>
@@ -5802,7 +5796,7 @@
                       </a:endParaRPr>
                     </a:p>
                   </a:txBody>
-                  <a:tcPr marL="91440" marR="91440" marT="45720" marB="45720" anchor="ctr">
+                  <a:tcPr anchor="ctr">
                     <a:lnL w="6350" cap="flat" cmpd="sng" algn="ctr">
                       <a:solidFill>
                         <a:srgbClr val="DDDDDD"/>
@@ -5841,6 +5835,11 @@
                     </a:lnB>
                   </a:tcPr>
                 </a:tc>
+                <a:extLst>
+                  <a:ext uri="{0D108BD9-81ED-4DB2-BD59-A6C34878D82A}">
+                    <a16:rowId xmlns:a16="http://schemas.microsoft.com/office/drawing/2014/main" val="10005"/>
+                  </a:ext>
+                </a:extLst>
               </a:tr>
             </a:tbl>
           </a:graphicData>
@@ -5867,7 +5866,7 @@
           <a:bodyPr wrap="square" rtlCol="0" anchor="ctr"/>
           <a:lstStyle/>
           <a:p>
-            <a:pPr indent="0" marL="0">
+            <a:pPr marL="0" indent="0">
               <a:buNone/>
             </a:pPr>
             <a:r>
@@ -5904,6 +5903,13 @@
           </a:solidFill>
           <a:ln/>
         </p:spPr>
+        <p:txBody>
+          <a:bodyPr/>
+          <a:lstStyle/>
+          <a:p>
+            <a:endParaRPr lang="en-IN"/>
+          </a:p>
+        </p:txBody>
       </p:sp>
       <p:sp>
         <p:nvSpPr>
@@ -5926,7 +5932,7 @@
           <a:bodyPr wrap="square" rtlCol="0" anchor="ctr"/>
           <a:lstStyle/>
           <a:p>
-            <a:pPr indent="0" marL="0">
+            <a:pPr marL="0" indent="0">
               <a:buNone/>
             </a:pPr>
             <a:r>
@@ -5965,7 +5971,7 @@
           <a:bodyPr wrap="square" rtlCol="0" anchor="ctr"/>
           <a:lstStyle/>
           <a:p>
-            <a:pPr indent="0" marL="0">
+            <a:pPr marL="0" indent="0">
               <a:buNone/>
             </a:pPr>
             <a:r>
@@ -5985,7 +5991,7 @@
       </p:sp>
       <p:sp>
         <p:nvSpPr>
-          <p:cNvPr id="8" name="Shape 5"/>
+          <p:cNvPr id="3" name="Shape 5"/>
           <p:cNvSpPr/>
           <p:nvPr/>
         </p:nvSpPr>
@@ -6002,6 +6008,13 @@
           </a:solidFill>
           <a:ln/>
         </p:spPr>
+        <p:txBody>
+          <a:bodyPr/>
+          <a:lstStyle/>
+          <a:p>
+            <a:endParaRPr lang="en-IN"/>
+          </a:p>
+        </p:txBody>
       </p:sp>
       <p:sp>
         <p:nvSpPr>
@@ -6024,7 +6037,7 @@
           <a:bodyPr wrap="square" rtlCol="0" anchor="ctr"/>
           <a:lstStyle/>
           <a:p>
-            <a:pPr indent="0" marL="0">
+            <a:pPr marL="0" indent="0">
               <a:buNone/>
             </a:pPr>
             <a:r>
@@ -6063,7 +6076,7 @@
           <a:bodyPr wrap="square" rtlCol="0" anchor="ctr"/>
           <a:lstStyle/>
           <a:p>
-            <a:pPr indent="0" marL="0">
+            <a:pPr marL="0" indent="0">
               <a:buNone/>
             </a:pPr>
             <a:r>
@@ -6100,6 +6113,13 @@
           </a:solidFill>
           <a:ln/>
         </p:spPr>
+        <p:txBody>
+          <a:bodyPr/>
+          <a:lstStyle/>
+          <a:p>
+            <a:endParaRPr lang="en-IN"/>
+          </a:p>
+        </p:txBody>
       </p:sp>
       <p:sp>
         <p:nvSpPr>
@@ -6122,7 +6142,7 @@
           <a:bodyPr wrap="square" rtlCol="0" anchor="ctr"/>
           <a:lstStyle/>
           <a:p>
-            <a:pPr indent="0" marL="0">
+            <a:pPr marL="0" indent="0">
               <a:buNone/>
             </a:pPr>
             <a:r>
@@ -6161,7 +6181,7 @@
           <a:bodyPr wrap="square" rtlCol="0" anchor="ctr"/>
           <a:lstStyle/>
           <a:p>
-            <a:pPr indent="0" marL="0">
+            <a:pPr marL="0" indent="0">
               <a:buNone/>
             </a:pPr>
             <a:r>
@@ -6198,6 +6218,13 @@
           </a:solidFill>
           <a:ln/>
         </p:spPr>
+        <p:txBody>
+          <a:bodyPr/>
+          <a:lstStyle/>
+          <a:p>
+            <a:endParaRPr lang="en-IN"/>
+          </a:p>
+        </p:txBody>
       </p:sp>
       <p:sp>
         <p:nvSpPr>
@@ -6220,7 +6247,7 @@
           <a:bodyPr wrap="square" rtlCol="0" anchor="ctr"/>
           <a:lstStyle/>
           <a:p>
-            <a:pPr indent="0" marL="0">
+            <a:pPr marL="0" indent="0">
               <a:buNone/>
             </a:pPr>
             <a:r>
@@ -6259,7 +6286,7 @@
           <a:bodyPr wrap="square" rtlCol="0" anchor="ctr"/>
           <a:lstStyle/>
           <a:p>
-            <a:pPr indent="0" marL="0">
+            <a:pPr marL="0" indent="0">
               <a:buNone/>
             </a:pPr>
             <a:r>
@@ -6296,6 +6323,13 @@
           </a:solidFill>
           <a:ln/>
         </p:spPr>
+        <p:txBody>
+          <a:bodyPr/>
+          <a:lstStyle/>
+          <a:p>
+            <a:endParaRPr lang="en-IN"/>
+          </a:p>
+        </p:txBody>
       </p:sp>
       <p:sp>
         <p:nvSpPr>
@@ -6318,7 +6352,7 @@
           <a:bodyPr wrap="square" rtlCol="0" anchor="ctr"/>
           <a:lstStyle/>
           <a:p>
-            <a:pPr indent="0" marL="0">
+            <a:pPr marL="0" indent="0">
               <a:buNone/>
             </a:pPr>
             <a:r>
@@ -6357,7 +6391,7 @@
           <a:bodyPr wrap="square" rtlCol="0" anchor="ctr"/>
           <a:lstStyle/>
           <a:p>
-            <a:pPr indent="0" marL="0">
+            <a:pPr marL="0" indent="0">
               <a:buNone/>
             </a:pPr>
             <a:r>
@@ -6396,7 +6430,7 @@
           <a:bodyPr wrap="square" rtlCol="0" anchor="ctr"/>
           <a:lstStyle/>
           <a:p>
-            <a:pPr indent="0" marL="0">
+            <a:pPr marL="0" indent="0">
               <a:buNone/>
             </a:pPr>
             <a:r>
@@ -6435,7 +6469,7 @@
           <a:bodyPr wrap="square" rtlCol="0" anchor="ctr"/>
           <a:lstStyle/>
           <a:p>
-            <a:pPr algn="r" indent="0" marL="0">
+            <a:pPr marL="0" indent="0" algn="r">
               <a:buNone/>
             </a:pPr>
             <a:r>
@@ -6469,6 +6503,7 @@
         <a:solidFill>
           <a:srgbClr val="FFFFFF"/>
         </a:solidFill>
+        <a:effectLst/>
       </p:bgPr>
     </p:bg>
     <p:spTree>
@@ -6506,7 +6541,7 @@
           <a:bodyPr wrap="square" rtlCol="0" anchor="ctr"/>
           <a:lstStyle/>
           <a:p>
-            <a:pPr indent="0" marL="0">
+            <a:pPr marL="0" indent="0">
               <a:buNone/>
             </a:pPr>
             <a:r>
@@ -6550,6 +6585,13 @@
             <a:prstDash val="solid"/>
           </a:ln>
         </p:spPr>
+        <p:txBody>
+          <a:bodyPr/>
+          <a:lstStyle/>
+          <a:p>
+            <a:endParaRPr lang="en-IN"/>
+          </a:p>
+        </p:txBody>
       </p:sp>
       <p:sp>
         <p:nvSpPr>
@@ -6570,6 +6612,13 @@
           </a:solidFill>
           <a:ln/>
         </p:spPr>
+        <p:txBody>
+          <a:bodyPr/>
+          <a:lstStyle/>
+          <a:p>
+            <a:endParaRPr lang="en-IN"/>
+          </a:p>
+        </p:txBody>
       </p:sp>
       <p:sp>
         <p:nvSpPr>
@@ -6592,7 +6641,7 @@
           <a:bodyPr wrap="square" rtlCol="0" anchor="ctr"/>
           <a:lstStyle/>
           <a:p>
-            <a:pPr algn="ctr" indent="0" marL="0">
+            <a:pPr marL="0" indent="0" algn="ctr">
               <a:buNone/>
             </a:pPr>
             <a:r>
@@ -6631,7 +6680,7 @@
           <a:bodyPr wrap="square" rtlCol="0" anchor="ctr"/>
           <a:lstStyle/>
           <a:p>
-            <a:pPr indent="0" marL="0">
+            <a:pPr marL="0" indent="0">
               <a:buNone/>
             </a:pPr>
             <a:r>
@@ -6675,6 +6724,13 @@
             <a:prstDash val="solid"/>
           </a:ln>
         </p:spPr>
+        <p:txBody>
+          <a:bodyPr/>
+          <a:lstStyle/>
+          <a:p>
+            <a:endParaRPr lang="en-IN"/>
+          </a:p>
+        </p:txBody>
       </p:sp>
       <p:sp>
         <p:nvSpPr>
@@ -6695,6 +6751,13 @@
           </a:solidFill>
           <a:ln/>
         </p:spPr>
+        <p:txBody>
+          <a:bodyPr/>
+          <a:lstStyle/>
+          <a:p>
+            <a:endParaRPr lang="en-IN"/>
+          </a:p>
+        </p:txBody>
       </p:sp>
       <p:sp>
         <p:nvSpPr>
@@ -6717,7 +6780,7 @@
           <a:bodyPr wrap="square" rtlCol="0" anchor="ctr"/>
           <a:lstStyle/>
           <a:p>
-            <a:pPr algn="ctr" indent="0" marL="0">
+            <a:pPr marL="0" indent="0" algn="ctr">
               <a:buNone/>
             </a:pPr>
             <a:r>
@@ -6756,7 +6819,7 @@
           <a:bodyPr wrap="square" rtlCol="0" anchor="ctr"/>
           <a:lstStyle/>
           <a:p>
-            <a:pPr indent="0" marL="0">
+            <a:pPr marL="0" indent="0">
               <a:buNone/>
             </a:pPr>
             <a:r>
@@ -6800,6 +6863,13 @@
             <a:prstDash val="solid"/>
           </a:ln>
         </p:spPr>
+        <p:txBody>
+          <a:bodyPr/>
+          <a:lstStyle/>
+          <a:p>
+            <a:endParaRPr lang="en-IN"/>
+          </a:p>
+        </p:txBody>
       </p:sp>
       <p:sp>
         <p:nvSpPr>
@@ -6820,6 +6890,13 @@
           </a:solidFill>
           <a:ln/>
         </p:spPr>
+        <p:txBody>
+          <a:bodyPr/>
+          <a:lstStyle/>
+          <a:p>
+            <a:endParaRPr lang="en-IN"/>
+          </a:p>
+        </p:txBody>
       </p:sp>
       <p:sp>
         <p:nvSpPr>
@@ -6842,7 +6919,7 @@
           <a:bodyPr wrap="square" rtlCol="0" anchor="ctr"/>
           <a:lstStyle/>
           <a:p>
-            <a:pPr algn="ctr" indent="0" marL="0">
+            <a:pPr marL="0" indent="0" algn="ctr">
               <a:buNone/>
             </a:pPr>
             <a:r>
@@ -6881,7 +6958,7 @@
           <a:bodyPr wrap="square" rtlCol="0" anchor="ctr"/>
           <a:lstStyle/>
           <a:p>
-            <a:pPr indent="0" marL="0">
+            <a:pPr marL="0" indent="0">
               <a:buNone/>
             </a:pPr>
             <a:r>
@@ -6925,6 +7002,13 @@
             <a:prstDash val="solid"/>
           </a:ln>
         </p:spPr>
+        <p:txBody>
+          <a:bodyPr/>
+          <a:lstStyle/>
+          <a:p>
+            <a:endParaRPr lang="en-IN"/>
+          </a:p>
+        </p:txBody>
       </p:sp>
       <p:sp>
         <p:nvSpPr>
@@ -6945,6 +7029,13 @@
           </a:solidFill>
           <a:ln/>
         </p:spPr>
+        <p:txBody>
+          <a:bodyPr/>
+          <a:lstStyle/>
+          <a:p>
+            <a:endParaRPr lang="en-IN"/>
+          </a:p>
+        </p:txBody>
       </p:sp>
       <p:sp>
         <p:nvSpPr>
@@ -6967,7 +7058,7 @@
           <a:bodyPr wrap="square" rtlCol="0" anchor="ctr"/>
           <a:lstStyle/>
           <a:p>
-            <a:pPr algn="ctr" indent="0" marL="0">
+            <a:pPr marL="0" indent="0" algn="ctr">
               <a:buNone/>
             </a:pPr>
             <a:r>
@@ -7006,7 +7097,7 @@
           <a:bodyPr wrap="square" rtlCol="0" anchor="ctr"/>
           <a:lstStyle/>
           <a:p>
-            <a:pPr indent="0" marL="0">
+            <a:pPr marL="0" indent="0">
               <a:buNone/>
             </a:pPr>
             <a:r>
@@ -7050,6 +7141,13 @@
             <a:prstDash val="solid"/>
           </a:ln>
         </p:spPr>
+        <p:txBody>
+          <a:bodyPr/>
+          <a:lstStyle/>
+          <a:p>
+            <a:endParaRPr lang="en-IN"/>
+          </a:p>
+        </p:txBody>
       </p:sp>
       <p:sp>
         <p:nvSpPr>
@@ -7070,6 +7168,13 @@
           </a:solidFill>
           <a:ln/>
         </p:spPr>
+        <p:txBody>
+          <a:bodyPr/>
+          <a:lstStyle/>
+          <a:p>
+            <a:endParaRPr lang="en-IN"/>
+          </a:p>
+        </p:txBody>
       </p:sp>
       <p:sp>
         <p:nvSpPr>
@@ -7092,7 +7197,7 @@
           <a:bodyPr wrap="square" rtlCol="0" anchor="ctr"/>
           <a:lstStyle/>
           <a:p>
-            <a:pPr algn="ctr" indent="0" marL="0">
+            <a:pPr marL="0" indent="0" algn="ctr">
               <a:buNone/>
             </a:pPr>
             <a:r>
@@ -7131,7 +7236,7 @@
           <a:bodyPr wrap="square" rtlCol="0" anchor="ctr"/>
           <a:lstStyle/>
           <a:p>
-            <a:pPr indent="0" marL="0">
+            <a:pPr marL="0" indent="0">
               <a:buNone/>
             </a:pPr>
             <a:r>
@@ -7170,7 +7275,7 @@
           <a:bodyPr wrap="square" rtlCol="0" anchor="ctr"/>
           <a:lstStyle/>
           <a:p>
-            <a:pPr indent="0" marL="0">
+            <a:pPr marL="0" indent="0">
               <a:buNone/>
             </a:pPr>
             <a:r>
@@ -7209,7 +7314,7 @@
           <a:bodyPr wrap="square" rtlCol="0" anchor="ctr"/>
           <a:lstStyle/>
           <a:p>
-            <a:pPr algn="r" indent="0" marL="0">
+            <a:pPr marL="0" indent="0" algn="r">
               <a:buNone/>
             </a:pPr>
             <a:r>
@@ -7243,6 +7348,7 @@
         <a:solidFill>
           <a:srgbClr val="FFFFFF"/>
         </a:solidFill>
+        <a:effectLst/>
       </p:bgPr>
     </p:bg>
     <p:spTree>
@@ -7280,7 +7386,7 @@
           <a:bodyPr wrap="square" rtlCol="0" anchor="ctr"/>
           <a:lstStyle/>
           <a:p>
-            <a:pPr indent="0" marL="0">
+            <a:pPr marL="0" indent="0">
               <a:buNone/>
             </a:pPr>
             <a:r>
@@ -7317,6 +7423,13 @@
           </a:solidFill>
           <a:ln/>
         </p:spPr>
+        <p:txBody>
+          <a:bodyPr/>
+          <a:lstStyle/>
+          <a:p>
+            <a:endParaRPr lang="en-IN"/>
+          </a:p>
+        </p:txBody>
       </p:sp>
       <p:sp>
         <p:nvSpPr>
@@ -7339,7 +7452,7 @@
           <a:bodyPr wrap="square" rtlCol="0" anchor="ctr"/>
           <a:lstStyle/>
           <a:p>
-            <a:pPr algn="ctr" indent="0" marL="0">
+            <a:pPr marL="0" indent="0" algn="ctr">
               <a:buNone/>
             </a:pPr>
             <a:r>
@@ -7378,7 +7491,7 @@
           <a:bodyPr wrap="square" rtlCol="0" anchor="t"/>
           <a:lstStyle/>
           <a:p>
-            <a:pPr indent="0" marL="0">
+            <a:pPr marL="0" indent="0">
               <a:buNone/>
             </a:pPr>
             <a:r>
@@ -7417,7 +7530,7 @@
           <a:bodyPr wrap="square" rtlCol="0" anchor="t"/>
           <a:lstStyle/>
           <a:p>
-            <a:pPr indent="0" marL="0">
+            <a:pPr marL="0" indent="0">
               <a:buNone/>
             </a:pPr>
             <a:r>
@@ -7456,7 +7569,7 @@
           <a:bodyPr wrap="square" rtlCol="0" anchor="t"/>
           <a:lstStyle/>
           <a:p>
-            <a:pPr indent="0" marL="0">
+            <a:pPr marL="0" indent="0">
               <a:buNone/>
             </a:pPr>
             <a:r>
@@ -7493,6 +7606,13 @@
           </a:solidFill>
           <a:ln/>
         </p:spPr>
+        <p:txBody>
+          <a:bodyPr/>
+          <a:lstStyle/>
+          <a:p>
+            <a:endParaRPr lang="en-IN"/>
+          </a:p>
+        </p:txBody>
       </p:sp>
       <p:sp>
         <p:nvSpPr>
@@ -7515,7 +7635,7 @@
           <a:bodyPr wrap="square" rtlCol="0" anchor="ctr"/>
           <a:lstStyle/>
           <a:p>
-            <a:pPr algn="ctr" indent="0" marL="0">
+            <a:pPr marL="0" indent="0" algn="ctr">
               <a:buNone/>
             </a:pPr>
             <a:r>
@@ -7554,7 +7674,7 @@
           <a:bodyPr wrap="square" rtlCol="0" anchor="t"/>
           <a:lstStyle/>
           <a:p>
-            <a:pPr indent="0" marL="0">
+            <a:pPr marL="0" indent="0">
               <a:buNone/>
             </a:pPr>
             <a:r>
@@ -7593,7 +7713,7 @@
           <a:bodyPr wrap="square" rtlCol="0" anchor="t"/>
           <a:lstStyle/>
           <a:p>
-            <a:pPr indent="0" marL="0">
+            <a:pPr marL="0" indent="0">
               <a:buNone/>
             </a:pPr>
             <a:r>
@@ -7632,7 +7752,7 @@
           <a:bodyPr wrap="square" rtlCol="0" anchor="t"/>
           <a:lstStyle/>
           <a:p>
-            <a:pPr indent="0" marL="0">
+            <a:pPr marL="0" indent="0">
               <a:buNone/>
             </a:pPr>
             <a:r>
@@ -7669,6 +7789,13 @@
           </a:solidFill>
           <a:ln/>
         </p:spPr>
+        <p:txBody>
+          <a:bodyPr/>
+          <a:lstStyle/>
+          <a:p>
+            <a:endParaRPr lang="en-IN"/>
+          </a:p>
+        </p:txBody>
       </p:sp>
       <p:sp>
         <p:nvSpPr>
@@ -7691,7 +7818,7 @@
           <a:bodyPr wrap="square" rtlCol="0" anchor="ctr"/>
           <a:lstStyle/>
           <a:p>
-            <a:pPr algn="ctr" indent="0" marL="0">
+            <a:pPr marL="0" indent="0" algn="ctr">
               <a:buNone/>
             </a:pPr>
             <a:r>
@@ -7730,7 +7857,7 @@
           <a:bodyPr wrap="square" rtlCol="0" anchor="t"/>
           <a:lstStyle/>
           <a:p>
-            <a:pPr indent="0" marL="0">
+            <a:pPr marL="0" indent="0">
               <a:buNone/>
             </a:pPr>
             <a:r>
@@ -7769,7 +7896,7 @@
           <a:bodyPr wrap="square" rtlCol="0" anchor="t"/>
           <a:lstStyle/>
           <a:p>
-            <a:pPr indent="0" marL="0">
+            <a:pPr marL="0" indent="0">
               <a:buNone/>
             </a:pPr>
             <a:r>
@@ -7808,7 +7935,7 @@
           <a:bodyPr wrap="square" rtlCol="0" anchor="t"/>
           <a:lstStyle/>
           <a:p>
-            <a:pPr indent="0" marL="0">
+            <a:pPr marL="0" indent="0">
               <a:buNone/>
             </a:pPr>
             <a:r>
@@ -7847,7 +7974,7 @@
           <a:bodyPr wrap="square" rtlCol="0" anchor="ctr"/>
           <a:lstStyle/>
           <a:p>
-            <a:pPr indent="0" marL="0">
+            <a:pPr marL="0" indent="0">
               <a:buNone/>
             </a:pPr>
             <a:r>
@@ -7886,7 +8013,7 @@
           <a:bodyPr wrap="square" rtlCol="0" anchor="ctr"/>
           <a:lstStyle/>
           <a:p>
-            <a:pPr algn="r" indent="0" marL="0">
+            <a:pPr marL="0" indent="0" algn="r">
               <a:buNone/>
             </a:pPr>
             <a:r>
@@ -8205,4 +8332,319 @@
     </a:ext>
   </a:extLst>
 </a:theme>
+</file>
+
+<file path=ppt/theme/theme2.xml><?xml version="1.0" encoding="utf-8"?>
+<a:theme xmlns:a="http://schemas.openxmlformats.org/drawingml/2006/main" name="Office Theme">
+  <a:themeElements>
+    <a:clrScheme name="Office">
+      <a:dk1>
+        <a:sysClr val="windowText" lastClr="000000"/>
+      </a:dk1>
+      <a:lt1>
+        <a:sysClr val="window" lastClr="FFFFFF"/>
+      </a:lt1>
+      <a:dk2>
+        <a:srgbClr val="0E2841"/>
+      </a:dk2>
+      <a:lt2>
+        <a:srgbClr val="E8E8E8"/>
+      </a:lt2>
+      <a:accent1>
+        <a:srgbClr val="156082"/>
+      </a:accent1>
+      <a:accent2>
+        <a:srgbClr val="E97132"/>
+      </a:accent2>
+      <a:accent3>
+        <a:srgbClr val="196B24"/>
+      </a:accent3>
+      <a:accent4>
+        <a:srgbClr val="0F9ED5"/>
+      </a:accent4>
+      <a:accent5>
+        <a:srgbClr val="A02B93"/>
+      </a:accent5>
+      <a:accent6>
+        <a:srgbClr val="4EA72E"/>
+      </a:accent6>
+      <a:hlink>
+        <a:srgbClr val="467886"/>
+      </a:hlink>
+      <a:folHlink>
+        <a:srgbClr val="96607D"/>
+      </a:folHlink>
+    </a:clrScheme>
+    <a:fontScheme name="Office">
+      <a:majorFont>
+        <a:latin typeface="Aptos Display" panose="02110004020202020204"/>
+        <a:ea typeface=""/>
+        <a:cs typeface=""/>
+        <a:font script="Jpan" typeface="游ゴシック Light"/>
+        <a:font script="Hang" typeface="맑은 고딕"/>
+        <a:font script="Hans" typeface="等线 Light"/>
+        <a:font script="Hant" typeface="新細明體"/>
+        <a:font script="Arab" typeface="Times New Roman"/>
+        <a:font script="Hebr" typeface="Times New Roman"/>
+        <a:font script="Thai" typeface="Angsana New"/>
+        <a:font script="Ethi" typeface="Nyala"/>
+        <a:font script="Beng" typeface="Vrinda"/>
+        <a:font script="Gujr" typeface="Shruti"/>
+        <a:font script="Khmr" typeface="MoolBoran"/>
+        <a:font script="Knda" typeface="Tunga"/>
+        <a:font script="Guru" typeface="Raavi"/>
+        <a:font script="Cans" typeface="Euphemia"/>
+        <a:font script="Cher" typeface="Plantagenet Cherokee"/>
+        <a:font script="Yiii" typeface="Microsoft Yi Baiti"/>
+        <a:font script="Tibt" typeface="Microsoft Himalaya"/>
+        <a:font script="Thaa" typeface="MV Boli"/>
+        <a:font script="Deva" typeface="Mangal"/>
+        <a:font script="Telu" typeface="Gautami"/>
+        <a:font script="Taml" typeface="Latha"/>
+        <a:font script="Syrc" typeface="Estrangelo Edessa"/>
+        <a:font script="Orya" typeface="Kalinga"/>
+        <a:font script="Mlym" typeface="Kartika"/>
+        <a:font script="Laoo" typeface="DokChampa"/>
+        <a:font script="Sinh" typeface="Iskoola Pota"/>
+        <a:font script="Mong" typeface="Mongolian Baiti"/>
+        <a:font script="Viet" typeface="Times New Roman"/>
+        <a:font script="Uigh" typeface="Microsoft Uighur"/>
+        <a:font script="Geor" typeface="Sylfaen"/>
+        <a:font script="Armn" typeface="Arial"/>
+        <a:font script="Bugi" typeface="Leelawadee UI"/>
+        <a:font script="Bopo" typeface="Microsoft JhengHei"/>
+        <a:font script="Java" typeface="Javanese Text"/>
+        <a:font script="Lisu" typeface="Segoe UI"/>
+        <a:font script="Mymr" typeface="Myanmar Text"/>
+        <a:font script="Nkoo" typeface="Ebrima"/>
+        <a:font script="Olck" typeface="Nirmala UI"/>
+        <a:font script="Osma" typeface="Ebrima"/>
+        <a:font script="Phag" typeface="Phagspa"/>
+        <a:font script="Syrn" typeface="Estrangelo Edessa"/>
+        <a:font script="Syrj" typeface="Estrangelo Edessa"/>
+        <a:font script="Syre" typeface="Estrangelo Edessa"/>
+        <a:font script="Sora" typeface="Nirmala UI"/>
+        <a:font script="Tale" typeface="Microsoft Tai Le"/>
+        <a:font script="Talu" typeface="Microsoft New Tai Lue"/>
+        <a:font script="Tfng" typeface="Ebrima"/>
+      </a:majorFont>
+      <a:minorFont>
+        <a:latin typeface="Aptos" panose="02110004020202020204"/>
+        <a:ea typeface=""/>
+        <a:cs typeface=""/>
+        <a:font script="Jpan" typeface="游ゴシック"/>
+        <a:font script="Hang" typeface="맑은 고딕"/>
+        <a:font script="Hans" typeface="等线"/>
+        <a:font script="Hant" typeface="新細明體"/>
+        <a:font script="Arab" typeface="Arial"/>
+        <a:font script="Hebr" typeface="Arial"/>
+        <a:font script="Thai" typeface="Cordia New"/>
+        <a:font script="Ethi" typeface="Nyala"/>
+        <a:font script="Beng" typeface="Vrinda"/>
+        <a:font script="Gujr" typeface="Shruti"/>
+        <a:font script="Khmr" typeface="DaunPenh"/>
+        <a:font script="Knda" typeface="Tunga"/>
+        <a:font script="Guru" typeface="Raavi"/>
+        <a:font script="Cans" typeface="Euphemia"/>
+        <a:font script="Cher" typeface="Plantagenet Cherokee"/>
+        <a:font script="Yiii" typeface="Microsoft Yi Baiti"/>
+        <a:font script="Tibt" typeface="Microsoft Himalaya"/>
+        <a:font script="Thaa" typeface="MV Boli"/>
+        <a:font script="Deva" typeface="Mangal"/>
+        <a:font script="Telu" typeface="Gautami"/>
+        <a:font script="Taml" typeface="Latha"/>
+        <a:font script="Syrc" typeface="Estrangelo Edessa"/>
+        <a:font script="Orya" typeface="Kalinga"/>
+        <a:font script="Mlym" typeface="Kartika"/>
+        <a:font script="Laoo" typeface="DokChampa"/>
+        <a:font script="Sinh" typeface="Iskoola Pota"/>
+        <a:font script="Mong" typeface="Mongolian Baiti"/>
+        <a:font script="Viet" typeface="Arial"/>
+        <a:font script="Uigh" typeface="Microsoft Uighur"/>
+        <a:font script="Geor" typeface="Sylfaen"/>
+        <a:font script="Armn" typeface="Arial"/>
+        <a:font script="Bugi" typeface="Leelawadee UI"/>
+        <a:font script="Bopo" typeface="Microsoft JhengHei"/>
+        <a:font script="Java" typeface="Javanese Text"/>
+        <a:font script="Lisu" typeface="Segoe UI"/>
+        <a:font script="Mymr" typeface="Myanmar Text"/>
+        <a:font script="Nkoo" typeface="Ebrima"/>
+        <a:font script="Olck" typeface="Nirmala UI"/>
+        <a:font script="Osma" typeface="Ebrima"/>
+        <a:font script="Phag" typeface="Phagspa"/>
+        <a:font script="Syrn" typeface="Estrangelo Edessa"/>
+        <a:font script="Syrj" typeface="Estrangelo Edessa"/>
+        <a:font script="Syre" typeface="Estrangelo Edessa"/>
+        <a:font script="Sora" typeface="Nirmala UI"/>
+        <a:font script="Tale" typeface="Microsoft Tai Le"/>
+        <a:font script="Talu" typeface="Microsoft New Tai Lue"/>
+        <a:font script="Tfng" typeface="Ebrima"/>
+      </a:minorFont>
+    </a:fontScheme>
+    <a:fmtScheme name="Office">
+      <a:fillStyleLst>
+        <a:solidFill>
+          <a:schemeClr val="phClr"/>
+        </a:solidFill>
+        <a:gradFill rotWithShape="1">
+          <a:gsLst>
+            <a:gs pos="0">
+              <a:schemeClr val="phClr">
+                <a:lumMod val="110000"/>
+                <a:satMod val="105000"/>
+                <a:tint val="67000"/>
+              </a:schemeClr>
+            </a:gs>
+            <a:gs pos="50000">
+              <a:schemeClr val="phClr">
+                <a:lumMod val="105000"/>
+                <a:satMod val="103000"/>
+                <a:tint val="73000"/>
+              </a:schemeClr>
+            </a:gs>
+            <a:gs pos="100000">
+              <a:schemeClr val="phClr">
+                <a:lumMod val="105000"/>
+                <a:satMod val="109000"/>
+                <a:tint val="81000"/>
+              </a:schemeClr>
+            </a:gs>
+          </a:gsLst>
+          <a:lin ang="5400000" scaled="0"/>
+        </a:gradFill>
+        <a:gradFill rotWithShape="1">
+          <a:gsLst>
+            <a:gs pos="0">
+              <a:schemeClr val="phClr">
+                <a:satMod val="103000"/>
+                <a:lumMod val="102000"/>
+                <a:tint val="94000"/>
+              </a:schemeClr>
+            </a:gs>
+            <a:gs pos="50000">
+              <a:schemeClr val="phClr">
+                <a:satMod val="110000"/>
+                <a:lumMod val="100000"/>
+                <a:shade val="100000"/>
+              </a:schemeClr>
+            </a:gs>
+            <a:gs pos="100000">
+              <a:schemeClr val="phClr">
+                <a:lumMod val="99000"/>
+                <a:satMod val="120000"/>
+                <a:shade val="78000"/>
+              </a:schemeClr>
+            </a:gs>
+          </a:gsLst>
+          <a:lin ang="5400000" scaled="0"/>
+        </a:gradFill>
+      </a:fillStyleLst>
+      <a:lnStyleLst>
+        <a:ln w="12700" cap="flat" cmpd="sng" algn="ctr">
+          <a:solidFill>
+            <a:schemeClr val="phClr"/>
+          </a:solidFill>
+          <a:prstDash val="solid"/>
+          <a:miter lim="800000"/>
+        </a:ln>
+        <a:ln w="19050" cap="flat" cmpd="sng" algn="ctr">
+          <a:solidFill>
+            <a:schemeClr val="phClr"/>
+          </a:solidFill>
+          <a:prstDash val="solid"/>
+          <a:miter lim="800000"/>
+        </a:ln>
+        <a:ln w="25400" cap="flat" cmpd="sng" algn="ctr">
+          <a:solidFill>
+            <a:schemeClr val="phClr"/>
+          </a:solidFill>
+          <a:prstDash val="solid"/>
+          <a:miter lim="800000"/>
+        </a:ln>
+      </a:lnStyleLst>
+      <a:effectStyleLst>
+        <a:effectStyle>
+          <a:effectLst/>
+        </a:effectStyle>
+        <a:effectStyle>
+          <a:effectLst/>
+        </a:effectStyle>
+        <a:effectStyle>
+          <a:effectLst>
+            <a:outerShdw blurRad="57150" dist="19050" dir="5400000" algn="ctr" rotWithShape="0">
+              <a:srgbClr val="000000">
+                <a:alpha val="63000"/>
+              </a:srgbClr>
+            </a:outerShdw>
+          </a:effectLst>
+        </a:effectStyle>
+      </a:effectStyleLst>
+      <a:bgFillStyleLst>
+        <a:solidFill>
+          <a:schemeClr val="phClr"/>
+        </a:solidFill>
+        <a:solidFill>
+          <a:schemeClr val="phClr">
+            <a:tint val="95000"/>
+            <a:satMod val="170000"/>
+          </a:schemeClr>
+        </a:solidFill>
+        <a:gradFill rotWithShape="1">
+          <a:gsLst>
+            <a:gs pos="0">
+              <a:schemeClr val="phClr">
+                <a:tint val="93000"/>
+                <a:satMod val="150000"/>
+                <a:shade val="98000"/>
+                <a:lumMod val="102000"/>
+              </a:schemeClr>
+            </a:gs>
+            <a:gs pos="50000">
+              <a:schemeClr val="phClr">
+                <a:tint val="98000"/>
+                <a:satMod val="130000"/>
+                <a:shade val="90000"/>
+                <a:lumMod val="103000"/>
+              </a:schemeClr>
+            </a:gs>
+            <a:gs pos="100000">
+              <a:schemeClr val="phClr">
+                <a:shade val="63000"/>
+                <a:satMod val="120000"/>
+              </a:schemeClr>
+            </a:gs>
+          </a:gsLst>
+          <a:lin ang="5400000" scaled="0"/>
+        </a:gradFill>
+      </a:bgFillStyleLst>
+    </a:fmtScheme>
+  </a:themeElements>
+  <a:objectDefaults>
+    <a:lnDef>
+      <a:spPr/>
+      <a:bodyPr/>
+      <a:lstStyle/>
+      <a:style>
+        <a:lnRef idx="2">
+          <a:schemeClr val="accent1"/>
+        </a:lnRef>
+        <a:fillRef idx="0">
+          <a:schemeClr val="accent1"/>
+        </a:fillRef>
+        <a:effectRef idx="1">
+          <a:schemeClr val="accent1"/>
+        </a:effectRef>
+        <a:fontRef idx="minor">
+          <a:schemeClr val="tx1"/>
+        </a:fontRef>
+      </a:style>
+    </a:lnDef>
+  </a:objectDefaults>
+  <a:extraClrSchemeLst/>
+  <a:extLst>
+    <a:ext uri="{05A4C25C-085E-4340-85A3-A5531E510DB2}">
+      <thm15:themeFamily xmlns:thm15="http://schemas.microsoft.com/office/thememl/2012/main" name="Office Theme" id="{2E142A2C-CD16-42D6-873A-C26D2A0506FA}" vid="{1BDDFF52-6CD6-40A5-AB3C-68EB2F1E4D0A}"/>
+    </a:ext>
+  </a:extLst>
+</a:theme>
 </file>